--- a/dist/weeks-대학원/컨셉트와프로세스_03주차_프로세스의계보.pptx
+++ b/dist/weeks-대학원/컨셉트와프로세스_03주차_프로세스의계보.pptx
@@ -1197,7 +1197,8 @@
               <a:rPr lang="en-US" dirty="0"/>
               <a:t>[말할 내용]
 본론 전에 10분, 지난 과제를 보겠습니다.
-다섯 편 정리표를 내 주셨습니다. 찾아오신 것 자체가 지난 회차보다 큰 진전입니다.
+다섯 편 정리표와 목차를 내 주셨습니다. 찾아오신 것 자체가 지난 회차보다 큰 진전입니다.
+목차부터 한마디 하겠습니다. 옮겨 적으신 분은 아시겠지만, 남의 논문 목차를 베껴 놓고 보면 내 논문에 뭐가 없는지가 바로 보입니다. 그 자리를 비워 두시면 됩니다. 지금 채울 필요 없어요. 비어 있다는 걸 아는 게 먼저입니다.
 다만 한 가지를 짚고 가야겠습니다. 방법 칸이 대체로 한 줄입니다. '설문조사', '사례 분석' 이런 식이에요.
 지난 회차에 말씀드린 다섯 가지를 다시 보시면 좋겠습니다. 왼쪽입니다.
 무엇을 자료로 삼았는가, 어떻게 모았는가, 본 조사 전에 무엇을 해 봤는가, 무엇을 기준으로 판단했는가, 무엇이 안 됐다고 적었는가.
@@ -10649,6 +10650,30 @@
             </a:r>
             <a:endParaRPr lang="en-US" sz="1200" dirty="0"/>
           </a:p>
+          <a:p>
+            <a:pPr marL="177800" indent="-177800">
+              <a:lnSpc>
+                <a:spcPct val="120000"/>
+              </a:lnSpc>
+              <a:spcAft>
+                <a:spcPts val="1100"/>
+              </a:spcAft>
+              <a:buSzPct val="100000"/>
+              <a:buChar char="•"/>
+            </a:pPr>
+            <a:r>
+              <a:rPr lang="en-US" sz="1200" dirty="0">
+                <a:solidFill>
+                  <a:srgbClr val="1F1F1F"/>
+                </a:solidFill>
+                <a:latin typeface="Pretendard" pitchFamily="34" charset="0"/>
+                <a:ea typeface="Pretendard" pitchFamily="34" charset="-122"/>
+                <a:cs typeface="Pretendard" pitchFamily="34" charset="-120"/>
+              </a:rPr>
+              <a:t>옮겨 적은 목차 아래에 내 논문의 절을 한 줄씩 단다</a:t>
+            </a:r>
+            <a:endParaRPr lang="en-US" sz="1200" dirty="0"/>
+          </a:p>
         </p:txBody>
       </p:sp>
       <p:sp>

--- a/dist/weeks-대학원/컨셉트와프로세스_03주차_프로세스의계보.pptx
+++ b/dist/weeks-대학원/컨셉트와프로세스_03주차_프로세스의계보.pptx
@@ -1197,8 +1197,7 @@
               <a:rPr lang="en-US" dirty="0"/>
               <a:t>[말할 내용]
 본론 전에 10분, 지난 과제를 보겠습니다.
-다섯 편 정리표와 목차를 내 주셨습니다. 찾아오신 것 자체가 지난 회차보다 큰 진전입니다.
-목차부터 한마디 하겠습니다. 옮겨 적으신 분은 아시겠지만, 남의 논문 목차를 베껴 놓고 보면 내 논문에 뭐가 없는지가 바로 보입니다. 그 자리를 비워 두시면 됩니다. 지금 채울 필요 없어요. 비어 있다는 걸 아는 게 먼저입니다.
+다섯 편 정리표를 내 주셨습니다. 찾아오신 것 자체가 지난 회차보다 큰 진전입니다.
 다만 한 가지를 짚고 가야겠습니다. 방법 칸이 대체로 한 줄입니다. '설문조사', '사례 분석' 이런 식이에요.
 지난 회차에 말씀드린 다섯 가지를 다시 보시면 좋겠습니다. 왼쪽입니다.
 무엇을 자료로 삼았는가, 어떻게 모았는가, 본 조사 전에 무엇을 해 봤는가, 무엇을 기준으로 판단했는가, 무엇이 안 됐다고 적었는가.
@@ -10650,30 +10649,6 @@
             </a:r>
             <a:endParaRPr lang="en-US" sz="1200" dirty="0"/>
           </a:p>
-          <a:p>
-            <a:pPr marL="177800" indent="-177800">
-              <a:lnSpc>
-                <a:spcPct val="120000"/>
-              </a:lnSpc>
-              <a:spcAft>
-                <a:spcPts val="1100"/>
-              </a:spcAft>
-              <a:buSzPct val="100000"/>
-              <a:buChar char="•"/>
-            </a:pPr>
-            <a:r>
-              <a:rPr lang="en-US" sz="1200" dirty="0">
-                <a:solidFill>
-                  <a:srgbClr val="1F1F1F"/>
-                </a:solidFill>
-                <a:latin typeface="Pretendard" pitchFamily="34" charset="0"/>
-                <a:ea typeface="Pretendard" pitchFamily="34" charset="-122"/>
-                <a:cs typeface="Pretendard" pitchFamily="34" charset="-120"/>
-              </a:rPr>
-              <a:t>옮겨 적은 목차 아래에 내 논문의 절을 한 줄씩 단다</a:t>
-            </a:r>
-            <a:endParaRPr lang="en-US" sz="1200" dirty="0"/>
-          </a:p>
         </p:txBody>
       </p:sp>
       <p:sp>

--- a/dist/weeks-대학원/컨셉트와프로세스_03주차_프로세스의계보.pptx
+++ b/dist/weeks-대학원/컨셉트와프로세스_03주차_프로세스의계보.pptx
@@ -3185,7 +3185,7 @@
         <p:spPr>
           <a:xfrm>
             <a:off x="640080" y="1627632"/>
-            <a:ext cx="5254600" cy="3419856"/>
+            <a:ext cx="5254600" cy="3127248"/>
           </a:xfrm>
           <a:prstGeom prst="rect">
             <a:avLst/>
@@ -3249,7 +3249,7 @@
         <p:spPr>
           <a:xfrm>
             <a:off x="6297016" y="1627632"/>
-            <a:ext cx="5254600" cy="3419856"/>
+            <a:ext cx="5254600" cy="3127248"/>
           </a:xfrm>
           <a:prstGeom prst="rect">
             <a:avLst/>
@@ -3352,7 +3352,7 @@
         <p:spPr>
           <a:xfrm>
             <a:off x="1042416" y="2688336"/>
-            <a:ext cx="4449928" cy="384048"/>
+            <a:ext cx="4449928" cy="329184"/>
           </a:xfrm>
           <a:prstGeom prst="rect">
             <a:avLst/>
@@ -3433,7 +3433,7 @@
         <p:spPr>
           <a:xfrm>
             <a:off x="6699352" y="2688336"/>
-            <a:ext cx="4449928" cy="384048"/>
+            <a:ext cx="4449928" cy="329184"/>
           </a:xfrm>
           <a:prstGeom prst="rect">
             <a:avLst/>
@@ -3474,7 +3474,7 @@
         </p:nvSpPr>
         <p:spPr>
           <a:xfrm>
-            <a:off x="1042416" y="3054096"/>
+            <a:off x="1042416" y="2980944"/>
             <a:ext cx="4449928" cy="7315"/>
           </a:xfrm>
           <a:prstGeom prst="rect">
@@ -3499,7 +3499,7 @@
         </p:nvSpPr>
         <p:spPr>
           <a:xfrm>
-            <a:off x="6699352" y="3054096"/>
+            <a:off x="6699352" y="2980944"/>
             <a:ext cx="4449928" cy="7315"/>
           </a:xfrm>
           <a:prstGeom prst="rect">
@@ -3524,7 +3524,7 @@
         </p:nvSpPr>
         <p:spPr>
           <a:xfrm>
-            <a:off x="1042416" y="3108960"/>
+            <a:off x="1042416" y="3035808"/>
             <a:ext cx="2011680" cy="274320"/>
           </a:xfrm>
           <a:prstGeom prst="rect">
@@ -3563,8 +3563,8 @@
         </p:nvSpPr>
         <p:spPr>
           <a:xfrm>
-            <a:off x="1042416" y="3346704"/>
-            <a:ext cx="4449928" cy="384048"/>
+            <a:off x="1042416" y="3273552"/>
+            <a:ext cx="4449928" cy="329184"/>
           </a:xfrm>
           <a:prstGeom prst="rect">
             <a:avLst/>
@@ -3605,7 +3605,7 @@
         </p:nvSpPr>
         <p:spPr>
           <a:xfrm>
-            <a:off x="6699352" y="3108960"/>
+            <a:off x="6699352" y="3035808"/>
             <a:ext cx="2011680" cy="274320"/>
           </a:xfrm>
           <a:prstGeom prst="rect">
@@ -3644,8 +3644,8 @@
         </p:nvSpPr>
         <p:spPr>
           <a:xfrm>
-            <a:off x="6699352" y="3346704"/>
-            <a:ext cx="4449928" cy="384048"/>
+            <a:off x="6699352" y="3273552"/>
+            <a:ext cx="4449928" cy="329184"/>
           </a:xfrm>
           <a:prstGeom prst="rect">
             <a:avLst/>
@@ -3686,7 +3686,7 @@
         </p:nvSpPr>
         <p:spPr>
           <a:xfrm>
-            <a:off x="1042416" y="3712464"/>
+            <a:off x="1042416" y="3566160"/>
             <a:ext cx="4449928" cy="7315"/>
           </a:xfrm>
           <a:prstGeom prst="rect">
@@ -3711,7 +3711,7 @@
         </p:nvSpPr>
         <p:spPr>
           <a:xfrm>
-            <a:off x="6699352" y="3712464"/>
+            <a:off x="6699352" y="3566160"/>
             <a:ext cx="4449928" cy="7315"/>
           </a:xfrm>
           <a:prstGeom prst="rect">
@@ -3736,7 +3736,7 @@
         </p:nvSpPr>
         <p:spPr>
           <a:xfrm>
-            <a:off x="1042416" y="3767328"/>
+            <a:off x="1042416" y="3621024"/>
             <a:ext cx="2011680" cy="274320"/>
           </a:xfrm>
           <a:prstGeom prst="rect">
@@ -3775,8 +3775,8 @@
         </p:nvSpPr>
         <p:spPr>
           <a:xfrm>
-            <a:off x="1042416" y="4005072"/>
-            <a:ext cx="4449928" cy="384048"/>
+            <a:off x="1042416" y="3858768"/>
+            <a:ext cx="4449928" cy="329184"/>
           </a:xfrm>
           <a:prstGeom prst="rect">
             <a:avLst/>
@@ -3817,7 +3817,7 @@
         </p:nvSpPr>
         <p:spPr>
           <a:xfrm>
-            <a:off x="6699352" y="3767328"/>
+            <a:off x="6699352" y="3621024"/>
             <a:ext cx="2011680" cy="274320"/>
           </a:xfrm>
           <a:prstGeom prst="rect">
@@ -3856,8 +3856,8 @@
         </p:nvSpPr>
         <p:spPr>
           <a:xfrm>
-            <a:off x="6699352" y="4005072"/>
-            <a:ext cx="4449928" cy="384048"/>
+            <a:off x="6699352" y="3858768"/>
+            <a:ext cx="4449928" cy="329184"/>
           </a:xfrm>
           <a:prstGeom prst="rect">
             <a:avLst/>
@@ -3898,7 +3898,7 @@
         </p:nvSpPr>
         <p:spPr>
           <a:xfrm>
-            <a:off x="1042416" y="4370832"/>
+            <a:off x="1042416" y="4151376"/>
             <a:ext cx="4449928" cy="7315"/>
           </a:xfrm>
           <a:prstGeom prst="rect">
@@ -3923,7 +3923,7 @@
         </p:nvSpPr>
         <p:spPr>
           <a:xfrm>
-            <a:off x="6699352" y="4370832"/>
+            <a:off x="6699352" y="4151376"/>
             <a:ext cx="4449928" cy="7315"/>
           </a:xfrm>
           <a:prstGeom prst="rect">
@@ -3948,7 +3948,7 @@
         </p:nvSpPr>
         <p:spPr>
           <a:xfrm>
-            <a:off x="1042416" y="4425696"/>
+            <a:off x="1042416" y="4206240"/>
             <a:ext cx="2011680" cy="274320"/>
           </a:xfrm>
           <a:prstGeom prst="rect">
@@ -3987,8 +3987,8 @@
         </p:nvSpPr>
         <p:spPr>
           <a:xfrm>
-            <a:off x="1042416" y="4663440"/>
-            <a:ext cx="4449928" cy="384048"/>
+            <a:off x="1042416" y="4443984"/>
+            <a:ext cx="4449928" cy="329184"/>
           </a:xfrm>
           <a:prstGeom prst="rect">
             <a:avLst/>
@@ -4029,7 +4029,7 @@
         </p:nvSpPr>
         <p:spPr>
           <a:xfrm>
-            <a:off x="6699352" y="4425696"/>
+            <a:off x="6699352" y="4206240"/>
             <a:ext cx="2011680" cy="274320"/>
           </a:xfrm>
           <a:prstGeom prst="rect">
@@ -4068,8 +4068,8 @@
         </p:nvSpPr>
         <p:spPr>
           <a:xfrm>
-            <a:off x="6699352" y="4663440"/>
-            <a:ext cx="4449928" cy="384048"/>
+            <a:off x="6699352" y="4443984"/>
+            <a:ext cx="4449928" cy="329184"/>
           </a:xfrm>
           <a:prstGeom prst="rect">
             <a:avLst/>
@@ -4105,6 +4105,73 @@
       <p:sp>
         <p:nvSpPr>
           <p:cNvPr id="35" name="Shape 33"/>
+          <p:cNvSpPr/>
+          <p:nvPr/>
+        </p:nvSpPr>
+        <p:spPr>
+          <a:xfrm>
+            <a:off x="640080" y="5010912"/>
+            <a:ext cx="10911535" cy="7315"/>
+          </a:xfrm>
+          <a:prstGeom prst="rect">
+            <a:avLst/>
+          </a:prstGeom>
+          <a:solidFill>
+            <a:srgbClr val="111111"/>
+          </a:solidFill>
+          <a:ln w="12700">
+            <a:solidFill>
+              <a:srgbClr val="111111"/>
+            </a:solidFill>
+            <a:prstDash val="solid"/>
+          </a:ln>
+        </p:spPr>
+      </p:sp>
+      <p:sp>
+        <p:nvSpPr>
+          <p:cNvPr id="36" name="Text 34"/>
+          <p:cNvSpPr/>
+          <p:nvPr/>
+        </p:nvSpPr>
+        <p:spPr>
+          <a:xfrm>
+            <a:off x="640080" y="5120640"/>
+            <a:ext cx="10911535" cy="402336"/>
+          </a:xfrm>
+          <a:prstGeom prst="rect">
+            <a:avLst/>
+          </a:prstGeom>
+          <a:noFill/>
+          <a:ln/>
+        </p:spPr>
+        <p:txBody>
+          <a:bodyPr wrap="square" lIns="0" tIns="0" rIns="0" bIns="0" rtlCol="0" anchor="t"/>
+          <a:lstStyle/>
+          <a:p>
+            <a:pPr indent="0" marL="0">
+              <a:lnSpc>
+                <a:spcPct val="120000"/>
+              </a:lnSpc>
+              <a:buNone/>
+            </a:pPr>
+            <a:r>
+              <a:rPr lang="en-US" sz="1300" b="1" dirty="0">
+                <a:solidFill>
+                  <a:srgbClr val="111111"/>
+                </a:solidFill>
+                <a:latin typeface="Pretendard" pitchFamily="34" charset="0"/>
+                <a:ea typeface="Pretendard" pitchFamily="34" charset="-122"/>
+                <a:cs typeface="Pretendard" pitchFamily="34" charset="-120"/>
+              </a:rPr>
+              <a:t>무너진 것은 '절차를 정하면 답이 나온다'는 믿음입니다. 절차를 적어 두려던 노력 자체는 남았습니다.</a:t>
+            </a:r>
+            <a:endParaRPr lang="en-US" sz="1300" dirty="0"/>
+          </a:p>
+        </p:txBody>
+      </p:sp>
+      <p:sp>
+        <p:nvSpPr>
+          <p:cNvPr id="37" name="Shape 35"/>
           <p:cNvSpPr/>
           <p:nvPr/>
         </p:nvSpPr>
@@ -4129,7 +4196,7 @@
       </p:sp>
       <p:sp>
         <p:nvSpPr>
-          <p:cNvPr id="36" name="Text 34"/>
+          <p:cNvPr id="38" name="Text 36"/>
           <p:cNvSpPr/>
           <p:nvPr/>
         </p:nvSpPr>
@@ -4168,7 +4235,7 @@
       </p:sp>
       <p:sp>
         <p:nvSpPr>
-          <p:cNvPr id="37" name="Text 35"/>
+          <p:cNvPr id="39" name="Text 37"/>
           <p:cNvSpPr/>
           <p:nvPr/>
         </p:nvSpPr>

--- a/dist/weeks-대학원/컨셉트와프로세스_03주차_프로세스의계보.pptx
+++ b/dist/weeks-대학원/컨셉트와프로세스_03주차_프로세스의계보.pptx
@@ -5780,7 +5780,7 @@
         <p:spPr>
           <a:xfrm>
             <a:off x="640080" y="1719072"/>
-            <a:ext cx="10911535" cy="822960"/>
+            <a:ext cx="10911535" cy="777240"/>
           </a:xfrm>
           <a:prstGeom prst="rect">
             <a:avLst/>
@@ -5805,7 +5805,7 @@
         <p:spPr>
           <a:xfrm>
             <a:off x="1097280" y="1810512"/>
-            <a:ext cx="3291840" cy="640080"/>
+            <a:ext cx="3291840" cy="594360"/>
           </a:xfrm>
           <a:prstGeom prst="rect">
             <a:avLst/>
@@ -5844,7 +5844,7 @@
         <p:spPr>
           <a:xfrm>
             <a:off x="4480560" y="1810512"/>
-            <a:ext cx="6705295" cy="640080"/>
+            <a:ext cx="6705295" cy="594360"/>
           </a:xfrm>
           <a:prstGeom prst="rect">
             <a:avLst/>
@@ -5885,8 +5885,8 @@
         </p:nvSpPr>
         <p:spPr>
           <a:xfrm>
-            <a:off x="640080" y="2688336"/>
-            <a:ext cx="10911535" cy="822960"/>
+            <a:off x="640080" y="2642616"/>
+            <a:ext cx="10911535" cy="777240"/>
           </a:xfrm>
           <a:prstGeom prst="rect">
             <a:avLst/>
@@ -5910,8 +5910,8 @@
         </p:nvSpPr>
         <p:spPr>
           <a:xfrm>
-            <a:off x="1097280" y="2779776"/>
-            <a:ext cx="3291840" cy="640080"/>
+            <a:off x="1097280" y="2734056"/>
+            <a:ext cx="3291840" cy="594360"/>
           </a:xfrm>
           <a:prstGeom prst="rect">
             <a:avLst/>
@@ -5949,8 +5949,8 @@
         </p:nvSpPr>
         <p:spPr>
           <a:xfrm>
-            <a:off x="4480560" y="2779776"/>
-            <a:ext cx="6705295" cy="640080"/>
+            <a:off x="4480560" y="2734056"/>
+            <a:ext cx="6705295" cy="594360"/>
           </a:xfrm>
           <a:prstGeom prst="rect">
             <a:avLst/>
@@ -5991,8 +5991,8 @@
         </p:nvSpPr>
         <p:spPr>
           <a:xfrm>
-            <a:off x="640080" y="3657600"/>
-            <a:ext cx="10911535" cy="822960"/>
+            <a:off x="640080" y="3566160"/>
+            <a:ext cx="10911535" cy="777240"/>
           </a:xfrm>
           <a:prstGeom prst="rect">
             <a:avLst/>
@@ -6016,8 +6016,8 @@
         </p:nvSpPr>
         <p:spPr>
           <a:xfrm>
-            <a:off x="1097280" y="3749040"/>
-            <a:ext cx="3291840" cy="640080"/>
+            <a:off x="1097280" y="3657600"/>
+            <a:ext cx="3291840" cy="594360"/>
           </a:xfrm>
           <a:prstGeom prst="rect">
             <a:avLst/>
@@ -6055,8 +6055,8 @@
         </p:nvSpPr>
         <p:spPr>
           <a:xfrm>
-            <a:off x="4480560" y="3749040"/>
-            <a:ext cx="6705295" cy="640080"/>
+            <a:off x="4480560" y="3657600"/>
+            <a:ext cx="6705295" cy="594360"/>
           </a:xfrm>
           <a:prstGeom prst="rect">
             <a:avLst/>
@@ -6097,8 +6097,8 @@
         </p:nvSpPr>
         <p:spPr>
           <a:xfrm>
-            <a:off x="640080" y="4626864"/>
-            <a:ext cx="10911535" cy="822960"/>
+            <a:off x="640080" y="4489704"/>
+            <a:ext cx="10911535" cy="777240"/>
           </a:xfrm>
           <a:prstGeom prst="rect">
             <a:avLst/>
@@ -6122,8 +6122,8 @@
         </p:nvSpPr>
         <p:spPr>
           <a:xfrm>
-            <a:off x="1097280" y="4718304"/>
-            <a:ext cx="3291840" cy="640080"/>
+            <a:off x="1097280" y="4581144"/>
+            <a:ext cx="3291840" cy="594360"/>
           </a:xfrm>
           <a:prstGeom prst="rect">
             <a:avLst/>
@@ -6161,8 +6161,8 @@
         </p:nvSpPr>
         <p:spPr>
           <a:xfrm>
-            <a:off x="4480560" y="4718304"/>
-            <a:ext cx="6705295" cy="640080"/>
+            <a:off x="4480560" y="4581144"/>
+            <a:ext cx="6705295" cy="594360"/>
           </a:xfrm>
           <a:prstGeom prst="rect">
             <a:avLst/>
@@ -6198,6 +6198,73 @@
       <p:sp>
         <p:nvSpPr>
           <p:cNvPr id="21" name="Shape 19"/>
+          <p:cNvSpPr/>
+          <p:nvPr/>
+        </p:nvSpPr>
+        <p:spPr>
+          <a:xfrm>
+            <a:off x="640080" y="5577840"/>
+            <a:ext cx="10911535" cy="7315"/>
+          </a:xfrm>
+          <a:prstGeom prst="rect">
+            <a:avLst/>
+          </a:prstGeom>
+          <a:solidFill>
+            <a:srgbClr val="111111"/>
+          </a:solidFill>
+          <a:ln w="12700">
+            <a:solidFill>
+              <a:srgbClr val="111111"/>
+            </a:solidFill>
+            <a:prstDash val="solid"/>
+          </a:ln>
+        </p:spPr>
+      </p:sp>
+      <p:sp>
+        <p:nvSpPr>
+          <p:cNvPr id="22" name="Text 20"/>
+          <p:cNvSpPr/>
+          <p:nvPr/>
+        </p:nvSpPr>
+        <p:spPr>
+          <a:xfrm>
+            <a:off x="640080" y="5687568"/>
+            <a:ext cx="10911535" cy="402336"/>
+          </a:xfrm>
+          <a:prstGeom prst="rect">
+            <a:avLst/>
+          </a:prstGeom>
+          <a:noFill/>
+          <a:ln/>
+        </p:spPr>
+        <p:txBody>
+          <a:bodyPr wrap="square" lIns="0" tIns="0" rIns="0" bIns="0" rtlCol="0" anchor="t"/>
+          <a:lstStyle/>
+          <a:p>
+            <a:pPr indent="0" marL="0">
+              <a:lnSpc>
+                <a:spcPct val="120000"/>
+              </a:lnSpc>
+              <a:buNone/>
+            </a:pPr>
+            <a:r>
+              <a:rPr lang="en-US" sz="1300" b="1" dirty="0">
+                <a:solidFill>
+                  <a:srgbClr val="111111"/>
+                </a:solidFill>
+                <a:latin typeface="Pretendard" pitchFamily="34" charset="0"/>
+                <a:ea typeface="Pretendard" pitchFamily="34" charset="-122"/>
+                <a:cs typeface="Pretendard" pitchFamily="34" charset="-120"/>
+              </a:rPr>
+              <a:t>판은 수업 후 공유 문서로 남깁니다. 과제는 이 판을 각자 다시 그려 오는 것입니다.</a:t>
+            </a:r>
+            <a:endParaRPr lang="en-US" sz="1300" dirty="0"/>
+          </a:p>
+        </p:txBody>
+      </p:sp>
+      <p:sp>
+        <p:nvSpPr>
+          <p:cNvPr id="23" name="Shape 21"/>
           <p:cNvSpPr/>
           <p:nvPr/>
         </p:nvSpPr>
@@ -6222,7 +6289,7 @@
       </p:sp>
       <p:sp>
         <p:nvSpPr>
-          <p:cNvPr id="22" name="Text 20"/>
+          <p:cNvPr id="24" name="Text 22"/>
           <p:cNvSpPr/>
           <p:nvPr/>
         </p:nvSpPr>
@@ -6261,7 +6328,7 @@
       </p:sp>
       <p:sp>
         <p:nvSpPr>
-          <p:cNvPr id="23" name="Text 21"/>
+          <p:cNvPr id="25" name="Text 23"/>
           <p:cNvSpPr/>
           <p:nvPr/>
         </p:nvSpPr>
